--- a/catalog/samples/proportional_circles.pptx
+++ b/catalog/samples/proportional_circles.pptx
@@ -1062,7 +1062,7 @@
           </a:p>
           <a:p>
             <a:r>
-              <a:t>  "template_sha256": "1fdfe283d9ec3139b85b68077ebc67c34931745f35f8884720a222e83e637739"</a:t>
+              <a:t>  "template_sha256": "f1f1d19e1b1350aa9a6bdc68002210de20c437c1bf31142b965fe1b7dd1f52ab"</a:t>
             </a:r>
           </a:p>
           <a:p>
